--- a/RECOMMENDATION.pptx
+++ b/RECOMMENDATION.pptx
@@ -509,7 +509,7 @@
           <a:p>
             <a:r>
               <a:rPr lang="en-US" dirty="0"/>
-              <a:t>The answer is on the first slide on purpose. Four tools, $2.37M, down to two tools and $1.76M. The 26% is the headline but I lead the room to the range immediately, because a single round number on a modelled negotiation invites the wrong question. Jira stays because Engineering will not move and should not. Asana becomes the standard for everyone else. The flex-down clause is the part I care most about, because it stops this problem recurring.</a:t>
+              <a:t>The answer is on the first slide on purpose. Four tools, 2.37M euros, down to two tools and 1.76M. The 26% is the headline but I lead the room to the range immediately, because a single round number on a modelled negotiation invites the wrong question. Jira stays because Engineering will not move and should not. Asana becomes the standard for everyone else. The flex-down clause is the part I care most about, because it stops this problem recurring.</a:t>
             </a:r>
             <a:endParaRPr lang="en-US" dirty="0"/>
           </a:p>
@@ -597,7 +597,7 @@
           <a:p>
             <a:r>
               <a:rPr lang="en-US" dirty="0"/>
-              <a:t>This is the situation, not the fix. $2.37M across four tools that do broadly the same job. Three problems underneath: duplication, shelf-ware, and the fact that nobody has ever bought this as one enterprise. Microsoft Planner is free with our M365 licence so I leave it out of scope. Note the colour coding carries through the whole deck: dark grey is keep, blue is the tool we standardise on, red is retire.</a:t>
+              <a:t>This is the situation, not the fix. 2.37M euros across four tools that do broadly the same job. Three problems underneath: duplication, shelf-ware, and the fact that nobody has ever bought this as one enterprise. Microsoft Planner is free with our M365 licence so I leave it out of scope. The colour coding carries through the whole deck: dark grey is keep, blue is the tool we standardise on, red is retire.</a:t>
             </a:r>
             <a:endParaRPr lang="en-US" dirty="0"/>
           </a:p>
@@ -685,7 +685,7 @@
           <a:p>
             <a:r>
               <a:rPr lang="en-US" dirty="0"/>
-              <a:t>Two lenses on the same waste. Left: bought versus used, 390 idle seats. Right: cost per active user, which is the number that actually matters, because a cheap tool nobody uses is not cheap. Trello and Monday.com are the worst on both. That is not a coincidence, it is the case for retiring them.</a:t>
+              <a:t>Two lenses on the same waste. Left: bought versus used, 390 idle seats. Right: cost per active user, the number that actually matters, because a cheap tool nobody uses is not cheap. Trello and Monday.com are worst on both. Not a coincidence, it is the case for retiring them.</a:t>
             </a:r>
             <a:endParaRPr lang="en-US" dirty="0"/>
           </a:p>
@@ -773,7 +773,7 @@
           <a:p>
             <a:r>
               <a:rPr lang="en-US" dirty="0"/>
-              <a:t>This is where judgement shows. The scorecard has Asana and Jira tied at exactly 4.00. If I just followed the number I would standardise on one of them and break the other group. Instead I read why each got to 4.00: Jira on dev-specific strengths, Asana on even breadth. That is the whole argument for keep-one-plus-standardise rather than pick-one. The four-card colour logic matches every other slide.</a:t>
+              <a:t>This is where judgement shows. The scorecard has Asana and Jira tied at exactly 4.00. If I just followed the number I would standardise on one and break the other group. Instead I read why each got to 4.00: Jira on dev-specific strengths, Asana on even breadth. That is the argument for keep-one-plus-standardise rather than pick-one.</a:t>
             </a:r>
             <a:endParaRPr lang="en-US" dirty="0"/>
           </a:p>
@@ -861,7 +861,7 @@
           <a:p>
             <a:r>
               <a:rPr lang="en-US" dirty="0"/>
-              <a:t>The waterfall reconciles current spend to end state through five moves, and it does not double count. The migrated seats are already priced at the negotiated rate, so the rate cut only applies to retained seats. That discipline is the difference between my number and the brief's, which double-counted unused licences against retired vendors. On the right, the range. I lead any interview with the conservative $540K because it needs the least defending and it happens to match the brief.</a:t>
+              <a:t>The waterfall reconciles current spend to end state through five moves, and it does not double count. The migrated seats are already priced at the negotiated rate, so the rate cut only applies to retained seats. That discipline is the difference between my number and the brief's, which double-counted unused licences against retired vendors. I lead any interview with the conservative 540K because it needs the least defending and it matches the brief.</a:t>
             </a:r>
             <a:endParaRPr lang="en-US" dirty="0"/>
           </a:p>
@@ -949,7 +949,7 @@
           <a:p>
             <a:r>
               <a:rPr lang="en-US" dirty="0"/>
-              <a:t>Most people stop at the recommendation. This slide is why timing is the real work. Monday.com lapsing a month before the Asana renewal is a gift, because I get to demonstrate the walk-away before I sit down with Asana. If the order were reversed I would be asking Asana to expand my commitment before showing any willingness to cut, which is a much weaker position. Sequence is leverage.</a:t>
+              <a:t>Most people stop at the recommendation. This slide is why timing is the real work. Monday.com lapsing a month before the Asana renewal is a gift, because I get to demonstrate the walk-away before I sit down with Asana. If the order were reversed I would be asking Asana to expand my commitment before showing any willingness to cut, a much weaker position. Sequence is leverage.</a:t>
             </a:r>
             <a:endParaRPr lang="en-US" dirty="0"/>
           </a:p>
@@ -1037,7 +1037,7 @@
           <a:p>
             <a:r>
               <a:rPr lang="en-US" dirty="0"/>
-              <a:t>This is the slide the other repos do not have. Concrete target, opening and walk-away, all anchored to list price. A real BATNA in Monday.com, which is what makes the walk-away credible. A concession ladder where every give is traded for a take, led by the gives that cost me little and that Asana values. And the flex-down clause, which is the one I spend my last leverage on, because it is governance not money. I am explicit that the rate is modelled, not quoted, so nobody thinks I am claiming a deal I have not done.</a:t>
+              <a:t>This is the slide the other repos do not have. Concrete target, opening and walk-away, all anchored to list price. A real BATNA in Monday.com, which makes the walk-away credible. A concession ladder where every give is traded for a take, led by the gives that cost me little and that Asana values. And the flex-down clause, the one I spend my last leverage on, because it is governance not money. I am explicit that the rate is modelled, not quoted.</a:t>
             </a:r>
             <a:endParaRPr lang="en-US" dirty="0"/>
           </a:p>
@@ -1125,7 +1125,7 @@
           <a:p>
             <a:r>
               <a:rPr lang="en-US" dirty="0"/>
-              <a:t>The appendix is where a CFO can check my working and where I put the honesty. The reconciliation table, the assumptions, and crucially the three numbers I trust least, ranked. Leading with limitations rather than hiding them is what makes the rest of the deck credible. The Jira blind spot is the big one: it is 44% of spend with no usage data, so I claim nothing from it rather than guessing.</a:t>
+              <a:t>The appendix is where a CFO can check my working and where I put the honesty. The reconciliation table, the assumptions, and the three numbers I trust least, ranked. Leading with limitations rather than hiding them is what makes the rest credible. The Jira blind spot is the big one: 44% of spend with no usage data, so I claim nothing from it rather than guessing.</a:t>
             </a:r>
             <a:endParaRPr lang="en-US" dirty="0"/>
           </a:p>
@@ -1593,7 +1593,7 @@
                 <a:ea typeface="Arial" pitchFamily="34" charset="-122"/>
                 <a:cs typeface="Arial" pitchFamily="34" charset="-120"/>
               </a:rPr>
-              <a:t>Save about $610K a year, 26% of spend.</a:t>
+              <a:t>Save about €610K a year, 26% of spend.</a:t>
             </a:r>
             <a:endParaRPr lang="en-US" sz="3400" dirty="0"/>
           </a:p>
@@ -1691,7 +1691,7 @@
                 <a:ea typeface="Arial" pitchFamily="34" charset="-122"/>
                 <a:cs typeface="Arial" pitchFamily="34" charset="-120"/>
               </a:rPr>
-              <a:t>Range: $540K (conservative) to $750K (optimistic).  The number rests on a modelled Asana rate, not a quote.</a:t>
+              <a:t>Range: €540K (conservative) to €750K (optimistic).  The number rests on a modelled Asana rate, not a quote.</a:t>
             </a:r>
             <a:endParaRPr lang="en-US" sz="1200" dirty="0"/>
           </a:p>
@@ -2385,7 +2385,7 @@
                 <a:ea typeface="Arial" pitchFamily="34" charset="-122"/>
                 <a:cs typeface="Arial" pitchFamily="34" charset="-120"/>
               </a:rPr>
-              <a:t>Trello costs $1,000 per active user and Monday.com $1,826. Retiring them and rehoming those users onto the standard tool removes the waste without removing the capability.</a:t>
+              <a:t>Trello costs €1,000 per active user and Monday.com €1,826. Retiring them and rehoming those users onto the standard tool removes the waste without removing the capability.</a:t>
             </a:r>
             <a:endParaRPr lang="en-US" sz="1300" dirty="0"/>
           </a:p>
@@ -3454,7 +3454,7 @@
                 <a:ea typeface="Arial" pitchFamily="34" charset="-122"/>
                 <a:cs typeface="Arial" pitchFamily="34" charset="-120"/>
               </a:rPr>
-              <a:t>$2.37M to $1.76M, with every lever isolated</a:t>
+              <a:t>€2.37M to €1.76M, with every lever isolated</a:t>
             </a:r>
             <a:endParaRPr lang="en-US" sz="2600" dirty="0"/>
           </a:p>
@@ -3578,7 +3578,7 @@
                 <a:ea typeface="Arial" pitchFamily="34" charset="-122"/>
                 <a:cs typeface="Arial" pitchFamily="34" charset="-120"/>
               </a:rPr>
-              <a:t>$540K</a:t>
+              <a:t>€540K</a:t>
             </a:r>
             <a:endParaRPr lang="en-US" sz="2200" dirty="0"/>
           </a:p>
@@ -3659,7 +3659,7 @@
                 <a:ea typeface="Arial" pitchFamily="34" charset="-122"/>
                 <a:cs typeface="Arial" pitchFamily="34" charset="-120"/>
               </a:rPr>
-              <a:t>$610K</a:t>
+              <a:t>€610K</a:t>
             </a:r>
             <a:endParaRPr lang="en-US" sz="2200" dirty="0"/>
           </a:p>
@@ -3740,7 +3740,7 @@
                 <a:ea typeface="Arial" pitchFamily="34" charset="-122"/>
                 <a:cs typeface="Arial" pitchFamily="34" charset="-120"/>
               </a:rPr>
-              <a:t>$750K</a:t>
+              <a:t>€750K</a:t>
             </a:r>
             <a:endParaRPr lang="en-US" sz="2200" dirty="0"/>
           </a:p>
@@ -4500,7 +4500,7 @@
                 <a:ea typeface="Arial" pitchFamily="34" charset="-122"/>
                 <a:cs typeface="Arial" pitchFamily="34" charset="-120"/>
               </a:rPr>
-              <a:t>$900</a:t>
+              <a:t>€900</a:t>
             </a:r>
             <a:endParaRPr lang="en-US" sz="1250" dirty="0"/>
           </a:p>
@@ -4539,7 +4539,7 @@
                 <a:ea typeface="Arial" pitchFamily="34" charset="-122"/>
                 <a:cs typeface="Arial" pitchFamily="34" charset="-120"/>
               </a:rPr>
-              <a:t>$639K</a:t>
+              <a:t>€639K</a:t>
             </a:r>
             <a:endParaRPr lang="en-US" sz="1250" dirty="0"/>
           </a:p>
@@ -4642,7 +4642,7 @@
                 <a:ea typeface="Arial" pitchFamily="34" charset="-122"/>
                 <a:cs typeface="Arial" pitchFamily="34" charset="-120"/>
               </a:rPr>
-              <a:t>$1,000</a:t>
+              <a:t>€1,000</a:t>
             </a:r>
             <a:endParaRPr lang="en-US" sz="1250" dirty="0"/>
           </a:p>
@@ -4681,7 +4681,7 @@
                 <a:ea typeface="Arial" pitchFamily="34" charset="-122"/>
                 <a:cs typeface="Arial" pitchFamily="34" charset="-120"/>
               </a:rPr>
-              <a:t>$710K</a:t>
+              <a:t>€710K</a:t>
             </a:r>
             <a:endParaRPr lang="en-US" sz="1250" dirty="0"/>
           </a:p>
@@ -4784,7 +4784,7 @@
                 <a:ea typeface="Arial" pitchFamily="34" charset="-122"/>
                 <a:cs typeface="Arial" pitchFamily="34" charset="-120"/>
               </a:rPr>
-              <a:t>$1,100</a:t>
+              <a:t>€1,100</a:t>
             </a:r>
             <a:endParaRPr lang="en-US" sz="1250" dirty="0"/>
           </a:p>
@@ -4823,7 +4823,7 @@
                 <a:ea typeface="Arial" pitchFamily="34" charset="-122"/>
                 <a:cs typeface="Arial" pitchFamily="34" charset="-120"/>
               </a:rPr>
-              <a:t>$781K</a:t>
+              <a:t>€781K</a:t>
             </a:r>
             <a:endParaRPr lang="en-US" sz="1250" dirty="0"/>
           </a:p>
@@ -5140,7 +5140,7 @@
                 <a:ea typeface="Arial" pitchFamily="34" charset="-122"/>
                 <a:cs typeface="Arial" pitchFamily="34" charset="-120"/>
               </a:rPr>
-              <a:t>Modelled, not quoted: the $1,000 target is reasoned from list price and deal shape. A live negotiation settles the exact number; the structure holds regardless.</a:t>
+              <a:t>Modelled, not quoted: the €1,000 target is reasoned from list price and deal shape. A live negotiation settles the exact number; the structure holds regardless.</a:t>
             </a:r>
             <a:endParaRPr lang="en-US" sz="1100" dirty="0"/>
           </a:p>
@@ -5758,7 +5758,7 @@
                           <a:ea typeface="Arial" pitchFamily="34" charset="-122"/>
                           <a:cs typeface="Arial" pitchFamily="34" charset="-120"/>
                         </a:rPr>
-                        <a:t>$1,050K</a:t>
+                        <a:t>€1,050K</a:t>
                       </a:r>
                       <a:endParaRPr lang="en-US" sz="1100" dirty="0">
                         <a:latin typeface="Arial" charset="0"/>
@@ -5823,7 +5823,7 @@
                           <a:ea typeface="Arial" pitchFamily="34" charset="-122"/>
                           <a:cs typeface="Arial" pitchFamily="34" charset="-120"/>
                         </a:rPr>
-                        <a:t>$1,050K</a:t>
+                        <a:t>€1,050K</a:t>
                       </a:r>
                       <a:endParaRPr lang="en-US" sz="1100" dirty="0">
                         <a:latin typeface="Arial" charset="0"/>
@@ -6020,7 +6020,7 @@
                           <a:ea typeface="Arial" pitchFamily="34" charset="-122"/>
                           <a:cs typeface="Arial" pitchFamily="34" charset="-120"/>
                         </a:rPr>
-                        <a:t>$780K</a:t>
+                        <a:t>€780K</a:t>
                       </a:r>
                       <a:endParaRPr lang="en-US" sz="1100" dirty="0">
                         <a:latin typeface="Arial" charset="0"/>
@@ -6085,7 +6085,7 @@
                           <a:ea typeface="Arial" pitchFamily="34" charset="-122"/>
                           <a:cs typeface="Arial" pitchFamily="34" charset="-120"/>
                         </a:rPr>
-                        <a:t>$710K</a:t>
+                        <a:t>€710K</a:t>
                       </a:r>
                       <a:endParaRPr lang="en-US" sz="1100" dirty="0">
                         <a:latin typeface="Arial" charset="0"/>
@@ -6150,7 +6150,7 @@
                           <a:ea typeface="Arial" pitchFamily="34" charset="-122"/>
                           <a:cs typeface="Arial" pitchFamily="34" charset="-120"/>
                         </a:rPr>
-                        <a:t>710 seats @ $1,000</a:t>
+                        <a:t>710 seats @ €1,000</a:t>
                       </a:r>
                       <a:endParaRPr lang="en-US" sz="1100" dirty="0">
                         <a:latin typeface="Arial" charset="0"/>
@@ -6282,7 +6282,7 @@
                           <a:ea typeface="Arial" pitchFamily="34" charset="-122"/>
                           <a:cs typeface="Arial" pitchFamily="34" charset="-120"/>
                         </a:rPr>
-                        <a:t>$420K</a:t>
+                        <a:t>€420K</a:t>
                       </a:r>
                       <a:endParaRPr lang="en-US" sz="1100" dirty="0">
                         <a:latin typeface="Arial" charset="0"/>
@@ -6347,7 +6347,7 @@
                           <a:ea typeface="Arial" pitchFamily="34" charset="-122"/>
                           <a:cs typeface="Arial" pitchFamily="34" charset="-120"/>
                         </a:rPr>
-                        <a:t>$0</a:t>
+                        <a:t>€0</a:t>
                       </a:r>
                       <a:endParaRPr lang="en-US" sz="1100" dirty="0">
                         <a:latin typeface="Arial" charset="0"/>
@@ -6544,7 +6544,7 @@
                           <a:ea typeface="Arial" pitchFamily="34" charset="-122"/>
                           <a:cs typeface="Arial" pitchFamily="34" charset="-120"/>
                         </a:rPr>
-                        <a:t>$120K</a:t>
+                        <a:t>€120K</a:t>
                       </a:r>
                       <a:endParaRPr lang="en-US" sz="1100" dirty="0">
                         <a:latin typeface="Arial" charset="0"/>
@@ -6609,7 +6609,7 @@
                           <a:ea typeface="Arial" pitchFamily="34" charset="-122"/>
                           <a:cs typeface="Arial" pitchFamily="34" charset="-120"/>
                         </a:rPr>
-                        <a:t>$0</a:t>
+                        <a:t>€0</a:t>
                       </a:r>
                       <a:endParaRPr lang="en-US" sz="1100" dirty="0">
                         <a:latin typeface="Arial" charset="0"/>
@@ -6806,7 +6806,7 @@
                           <a:ea typeface="Arial" pitchFamily="34" charset="-122"/>
                           <a:cs typeface="Arial" pitchFamily="34" charset="-120"/>
                         </a:rPr>
-                        <a:t>$2,370K</a:t>
+                        <a:t>€2,370K</a:t>
                       </a:r>
                       <a:endParaRPr lang="en-US" sz="1100" dirty="0">
                         <a:latin typeface="Arial" charset="0"/>
@@ -6871,7 +6871,7 @@
                           <a:ea typeface="Arial" pitchFamily="34" charset="-122"/>
                           <a:cs typeface="Arial" pitchFamily="34" charset="-120"/>
                         </a:rPr>
-                        <a:t>$1,760K</a:t>
+                        <a:t>€1,760K</a:t>
                       </a:r>
                       <a:endParaRPr lang="en-US" sz="1100" dirty="0">
                         <a:latin typeface="Arial" charset="0"/>
@@ -6936,7 +6936,7 @@
                           <a:ea typeface="Arial" pitchFamily="34" charset="-122"/>
                           <a:cs typeface="Arial" pitchFamily="34" charset="-120"/>
                         </a:rPr>
-                        <a:t>−$610K / yr</a:t>
+                        <a:t>−€610K / yr</a:t>
                       </a:r>
                       <a:endParaRPr lang="en-US" sz="1100" dirty="0">
                         <a:latin typeface="Arial" charset="0"/>
@@ -7082,7 +7082,7 @@
                 <a:ea typeface="Arial" pitchFamily="34" charset="-122"/>
                 <a:cs typeface="Arial" pitchFamily="34" charset="-120"/>
               </a:rPr>
-              <a:t>• Negotiated rate $1,000/seat vs $1,200 list (modelled).
+              <a:t>• Negotiated rate €1,000/seat vs €1,200 list (modelled).
 </a:t>
             </a:r>
             <a:pPr indent="0" marL="0">
